--- a/A Study inAlternative GameControllers.pptx
+++ b/A Study inAlternative GameControllers.pptx
@@ -257,7 +257,7 @@
           <a:p>
             <a:fld id="{846CE7D5-CF57-46EF-B807-FDD0502418D4}" type="datetimeFigureOut">
               <a:rPr lang="en-GB" smtClean="0"/>
-              <a:t>21/03/2026</a:t>
+              <a:t>23/03/2026</a:t>
             </a:fld>
             <a:endParaRPr lang="en-GB"/>
           </a:p>
@@ -427,7 +427,7 @@
           <a:p>
             <a:fld id="{846CE7D5-CF57-46EF-B807-FDD0502418D4}" type="datetimeFigureOut">
               <a:rPr lang="en-GB" smtClean="0"/>
-              <a:t>21/03/2026</a:t>
+              <a:t>23/03/2026</a:t>
             </a:fld>
             <a:endParaRPr lang="en-GB"/>
           </a:p>
@@ -607,7 +607,7 @@
           <a:p>
             <a:fld id="{846CE7D5-CF57-46EF-B807-FDD0502418D4}" type="datetimeFigureOut">
               <a:rPr lang="en-GB" smtClean="0"/>
-              <a:t>21/03/2026</a:t>
+              <a:t>23/03/2026</a:t>
             </a:fld>
             <a:endParaRPr lang="en-GB"/>
           </a:p>
@@ -777,7 +777,7 @@
           <a:p>
             <a:fld id="{846CE7D5-CF57-46EF-B807-FDD0502418D4}" type="datetimeFigureOut">
               <a:rPr lang="en-GB" smtClean="0"/>
-              <a:t>21/03/2026</a:t>
+              <a:t>23/03/2026</a:t>
             </a:fld>
             <a:endParaRPr lang="en-GB"/>
           </a:p>
@@ -1023,7 +1023,7 @@
           <a:p>
             <a:fld id="{846CE7D5-CF57-46EF-B807-FDD0502418D4}" type="datetimeFigureOut">
               <a:rPr lang="en-GB" smtClean="0"/>
-              <a:t>21/03/2026</a:t>
+              <a:t>23/03/2026</a:t>
             </a:fld>
             <a:endParaRPr lang="en-GB"/>
           </a:p>
@@ -1255,7 +1255,7 @@
           <a:p>
             <a:fld id="{846CE7D5-CF57-46EF-B807-FDD0502418D4}" type="datetimeFigureOut">
               <a:rPr lang="en-GB" smtClean="0"/>
-              <a:t>21/03/2026</a:t>
+              <a:t>23/03/2026</a:t>
             </a:fld>
             <a:endParaRPr lang="en-GB"/>
           </a:p>
@@ -1622,7 +1622,7 @@
           <a:p>
             <a:fld id="{846CE7D5-CF57-46EF-B807-FDD0502418D4}" type="datetimeFigureOut">
               <a:rPr lang="en-GB" smtClean="0"/>
-              <a:t>21/03/2026</a:t>
+              <a:t>23/03/2026</a:t>
             </a:fld>
             <a:endParaRPr lang="en-GB"/>
           </a:p>
@@ -1740,7 +1740,7 @@
           <a:p>
             <a:fld id="{846CE7D5-CF57-46EF-B807-FDD0502418D4}" type="datetimeFigureOut">
               <a:rPr lang="en-GB" smtClean="0"/>
-              <a:t>21/03/2026</a:t>
+              <a:t>23/03/2026</a:t>
             </a:fld>
             <a:endParaRPr lang="en-GB"/>
           </a:p>
@@ -1835,7 +1835,7 @@
           <a:p>
             <a:fld id="{846CE7D5-CF57-46EF-B807-FDD0502418D4}" type="datetimeFigureOut">
               <a:rPr lang="en-GB" smtClean="0"/>
-              <a:t>21/03/2026</a:t>
+              <a:t>23/03/2026</a:t>
             </a:fld>
             <a:endParaRPr lang="en-GB"/>
           </a:p>
@@ -2112,7 +2112,7 @@
           <a:p>
             <a:fld id="{846CE7D5-CF57-46EF-B807-FDD0502418D4}" type="datetimeFigureOut">
               <a:rPr lang="en-GB" smtClean="0"/>
-              <a:t>21/03/2026</a:t>
+              <a:t>23/03/2026</a:t>
             </a:fld>
             <a:endParaRPr lang="en-GB"/>
           </a:p>
@@ -2369,7 +2369,7 @@
           <a:p>
             <a:fld id="{846CE7D5-CF57-46EF-B807-FDD0502418D4}" type="datetimeFigureOut">
               <a:rPr lang="en-GB" smtClean="0"/>
-              <a:t>21/03/2026</a:t>
+              <a:t>23/03/2026</a:t>
             </a:fld>
             <a:endParaRPr lang="en-GB"/>
           </a:p>
@@ -2582,7 +2582,7 @@
           <a:p>
             <a:fld id="{846CE7D5-CF57-46EF-B807-FDD0502418D4}" type="datetimeFigureOut">
               <a:rPr lang="en-GB" smtClean="0"/>
-              <a:t>21/03/2026</a:t>
+              <a:t>23/03/2026</a:t>
             </a:fld>
             <a:endParaRPr lang="en-GB"/>
           </a:p>
@@ -3602,37 +3602,6 @@
           </a:p>
         </p:txBody>
       </p:sp>
-      <p:sp>
-        <p:nvSpPr>
-          <p:cNvPr id="3" name="Subtitle 2"/>
-          <p:cNvSpPr>
-            <a:spLocks noGrp="1"/>
-          </p:cNvSpPr>
-          <p:nvPr>
-            <p:ph type="subTitle" idx="1"/>
-          </p:nvPr>
-        </p:nvSpPr>
-        <p:spPr>
-          <a:xfrm>
-            <a:off x="859028" y="5166367"/>
-            <a:ext cx="4160233" cy="850998"/>
-          </a:xfrm>
-        </p:spPr>
-        <p:txBody>
-          <a:bodyPr vert="horz" lIns="91440" tIns="45720" rIns="91440" bIns="45720" rtlCol="0">
-            <a:normAutofit/>
-          </a:bodyPr>
-          <a:lstStyle/>
-          <a:p>
-            <a:pPr algn="l"/>
-            <a:endParaRPr lang="en-GB" sz="2000">
-              <a:solidFill>
-                <a:srgbClr val="FFFFFF"/>
-              </a:solidFill>
-            </a:endParaRPr>
-          </a:p>
-        </p:txBody>
-      </p:sp>
     </p:spTree>
     <p:extLst>
       <p:ext uri="{BB962C8B-B14F-4D97-AF65-F5344CB8AC3E}">
@@ -4229,42 +4198,32 @@
           <a:lstStyle/>
           <a:p>
             <a:r>
-              <a:rPr lang="en-GB"/>
+              <a:rPr lang="en-GB" dirty="0"/>
               <a:t>First Person Shooter</a:t>
             </a:r>
           </a:p>
           <a:p>
             <a:r>
-              <a:rPr lang="en-GB"/>
+              <a:rPr lang="en-GB" dirty="0"/>
               <a:t>Playable on PC</a:t>
             </a:r>
-            <a:endParaRPr lang="en-GB" dirty="0"/>
-          </a:p>
-          <a:p>
-            <a:r>
-              <a:rPr lang="en-GB"/>
+          </a:p>
+          <a:p>
+            <a:r>
+              <a:rPr lang="en-GB" dirty="0"/>
               <a:t>Custom Controller (Pi Pico W H &amp; MPU6050)</a:t>
             </a:r>
           </a:p>
           <a:p>
             <a:r>
-              <a:rPr lang="en-GB"/>
-              <a:t>Study on how alternative controllers effect gameplay</a:t>
-            </a:r>
-            <a:endParaRPr lang="en-GB" dirty="0"/>
-          </a:p>
-          <a:p>
-            <a:r>
               <a:rPr lang="en-GB" dirty="0"/>
-              <a:t>Address the </a:t>
-            </a:r>
-            <a:r>
-              <a:rPr lang="en-GB"/>
-              <a:t>accessibility</a:t>
-            </a:r>
+              <a:t>Study on how alternative controllers effect gameplay and immersion.</a:t>
+            </a:r>
+          </a:p>
+          <a:p>
             <a:r>
               <a:rPr lang="en-GB" dirty="0"/>
-              <a:t> and ethics</a:t>
+              <a:t>Address the accessibility and ethics</a:t>
             </a:r>
           </a:p>
           <a:p>
